--- a/content/W00/D4/slides/C2_W00_D04_half1_STUDENT.pptx
+++ b/content/W00/D4/slides/C2_W00_D04_half1_STUDENT.pptx
@@ -4365,14 +4365,14 @@
       </p:sp>
       <p:pic>
         <p:nvPicPr>
-          <p:cNvPr id="6" name="Picture 5" descr="099efd3760c3dac9.png"/>
+          <p:cNvPr id="6" name="Picture 5" descr="1508e9689edc5e8d.png"/>
           <p:cNvPicPr>
             <a:picLocks noChangeAspect="1"/>
           </p:cNvPicPr>
           <p:nvPr/>
         </p:nvPicPr>
         <p:blipFill>
-          <a:blip r:embed="rId2"/>
+          <a:blip r:embed="rId3"/>
           <a:stretch>
             <a:fillRect/>
           </a:stretch>
@@ -5795,14 +5795,14 @@
       </p:sp>
       <p:pic>
         <p:nvPicPr>
-          <p:cNvPr id="7" name="Picture 6" descr="8b6d5fbe7648a337.png"/>
+          <p:cNvPr id="7" name="Picture 6" descr="d9f5d5431a93de8d.png"/>
           <p:cNvPicPr>
             <a:picLocks noChangeAspect="1"/>
           </p:cNvPicPr>
           <p:nvPr/>
         </p:nvPicPr>
         <p:blipFill>
-          <a:blip r:embed="rId2"/>
+          <a:blip r:embed="rId3"/>
           <a:stretch>
             <a:fillRect/>
           </a:stretch>
@@ -7276,14 +7276,14 @@
       </p:sp>
       <p:pic>
         <p:nvPicPr>
-          <p:cNvPr id="6" name="Picture 5" descr="55baefeb2a6c6635.png"/>
+          <p:cNvPr id="6" name="Picture 5" descr="e7f0f8e6a8867727.png"/>
           <p:cNvPicPr>
             <a:picLocks noChangeAspect="1"/>
           </p:cNvPicPr>
           <p:nvPr/>
         </p:nvPicPr>
         <p:blipFill>
-          <a:blip r:embed="rId2"/>
+          <a:blip r:embed="rId3"/>
           <a:stretch>
             <a:fillRect/>
           </a:stretch>
@@ -8886,14 +8886,14 @@
       </p:sp>
       <p:pic>
         <p:nvPicPr>
-          <p:cNvPr id="6" name="Picture 5" descr="1db161edab7ef396.png"/>
+          <p:cNvPr id="6" name="Picture 5" descr="1b44161c3eb0a3db.png"/>
           <p:cNvPicPr>
             <a:picLocks noChangeAspect="1"/>
           </p:cNvPicPr>
           <p:nvPr/>
         </p:nvPicPr>
         <p:blipFill>
-          <a:blip r:embed="rId2"/>
+          <a:blip r:embed="rId3"/>
           <a:stretch>
             <a:fillRect/>
           </a:stretch>
@@ -9675,14 +9675,14 @@
       </p:sp>
       <p:pic>
         <p:nvPicPr>
-          <p:cNvPr id="6" name="Picture 5" descr="79ee42a63918923f.png"/>
+          <p:cNvPr id="6" name="Picture 5" descr="597ba8f0daf87a59.png"/>
           <p:cNvPicPr>
             <a:picLocks noChangeAspect="1"/>
           </p:cNvPicPr>
           <p:nvPr/>
         </p:nvPicPr>
         <p:blipFill>
-          <a:blip r:embed="rId2"/>
+          <a:blip r:embed="rId3"/>
           <a:stretch>
             <a:fillRect/>
           </a:stretch>

--- a/content/W00/D4/slides/C2_W00_D04_half1_STUDENT.pptx
+++ b/content/W00/D4/slides/C2_W00_D04_half1_STUDENT.pptx
@@ -5793,9 +5793,223 @@
           </a:p>
         </p:txBody>
       </p:sp>
+      <p:sp>
+        <p:nvSpPr>
+          <p:cNvPr id="7" name="Rectangle 6"/>
+          <p:cNvSpPr/>
+          <p:nvPr/>
+        </p:nvSpPr>
+        <p:spPr>
+          <a:xfrm>
+            <a:off x="685800" y="1627632"/>
+            <a:ext cx="10820095" cy="1265936"/>
+          </a:xfrm>
+          <a:prstGeom prst="rect">
+            <a:avLst/>
+          </a:prstGeom>
+          <a:solidFill>
+            <a:srgbClr val="1C1C1A"/>
+          </a:solidFill>
+          <a:ln>
+            <a:noFill/>
+          </a:ln>
+          <a:effectLst/>
+        </p:spPr>
+        <p:style>
+          <a:lnRef idx="1">
+            <a:schemeClr val="accent1"/>
+          </a:lnRef>
+          <a:fillRef idx="3">
+            <a:schemeClr val="accent1"/>
+          </a:fillRef>
+          <a:effectRef idx="2">
+            <a:schemeClr val="accent1"/>
+          </a:effectRef>
+          <a:fontRef idx="minor">
+            <a:schemeClr val="lt1"/>
+          </a:fontRef>
+        </p:style>
+        <p:txBody>
+          <a:bodyPr rtlCol="0" anchor="ctr" wrap="square"/>
+          <a:lstStyle/>
+          <a:p>
+            <a:pPr algn="ctr"/>
+          </a:p>
+        </p:txBody>
+      </p:sp>
+      <p:sp>
+        <p:nvSpPr>
+          <p:cNvPr id="8" name="Rectangle 7"/>
+          <p:cNvSpPr/>
+          <p:nvPr/>
+        </p:nvSpPr>
+        <p:spPr>
+          <a:xfrm>
+            <a:off x="685800" y="1627632"/>
+            <a:ext cx="50292" cy="1265936"/>
+          </a:xfrm>
+          <a:prstGeom prst="rect">
+            <a:avLst/>
+          </a:prstGeom>
+          <a:solidFill>
+            <a:srgbClr val="2B4A7D"/>
+          </a:solidFill>
+          <a:ln>
+            <a:noFill/>
+          </a:ln>
+          <a:effectLst/>
+        </p:spPr>
+        <p:style>
+          <a:lnRef idx="1">
+            <a:schemeClr val="accent1"/>
+          </a:lnRef>
+          <a:fillRef idx="3">
+            <a:schemeClr val="accent1"/>
+          </a:fillRef>
+          <a:effectRef idx="2">
+            <a:schemeClr val="accent1"/>
+          </a:effectRef>
+          <a:fontRef idx="minor">
+            <a:schemeClr val="lt1"/>
+          </a:fontRef>
+        </p:style>
+        <p:txBody>
+          <a:bodyPr rtlCol="0" anchor="ctr" wrap="square"/>
+          <a:lstStyle/>
+          <a:p>
+            <a:pPr algn="ctr"/>
+          </a:p>
+        </p:txBody>
+      </p:sp>
+      <p:sp>
+        <p:nvSpPr>
+          <p:cNvPr id="9" name="TextBox 8"/>
+          <p:cNvSpPr txBox="1"/>
+          <p:nvPr/>
+        </p:nvSpPr>
+        <p:spPr>
+          <a:xfrm>
+            <a:off x="923544" y="1728216"/>
+            <a:ext cx="10417759" cy="1083056"/>
+          </a:xfrm>
+          <a:prstGeom prst="rect">
+            <a:avLst/>
+          </a:prstGeom>
+          <a:noFill/>
+        </p:spPr>
+        <p:txBody>
+          <a:bodyPr wrap="square" anchor="t" lIns="0" rIns="0" tIns="0" bIns="0">
+            <a:spAutoFit/>
+          </a:bodyPr>
+          <a:lstStyle/>
+          <a:p>
+            <a:pPr>
+              <a:spcAft>
+                <a:spcPts val="200"/>
+              </a:spcAft>
+            </a:pPr>
+            <a:r>
+              <a:rPr sz="1400" b="0">
+                <a:solidFill>
+                  <a:srgbClr val="E4ECF7"/>
+                </a:solidFill>
+                <a:latin typeface="Consolas"/>
+              </a:rPr>
+              <a:t>SELECT SUM(days_kept - 14) AS late_days</a:t>
+            </a:r>
+          </a:p>
+          <a:p>
+            <a:pPr>
+              <a:spcAft>
+                <a:spcPts val="200"/>
+              </a:spcAft>
+            </a:pPr>
+            <a:r>
+              <a:rPr sz="1400" b="0">
+                <a:solidFill>
+                  <a:srgbClr val="E4ECF7"/>
+                </a:solidFill>
+                <a:latin typeface="Consolas"/>
+              </a:rPr>
+              <a:t>FROM issues</a:t>
+            </a:r>
+          </a:p>
+          <a:p>
+            <a:pPr>
+              <a:spcAft>
+                <a:spcPts val="200"/>
+              </a:spcAft>
+            </a:pPr>
+            <a:r>
+              <a:rPr sz="1400" b="0">
+                <a:solidFill>
+                  <a:srgbClr val="E4ECF7"/>
+                </a:solidFill>
+                <a:latin typeface="Consolas"/>
+              </a:rPr>
+              <a:t>WHERE week = 1</a:t>
+            </a:r>
+          </a:p>
+          <a:p>
+            <a:pPr>
+              <a:spcAft>
+                <a:spcPts val="200"/>
+              </a:spcAft>
+            </a:pPr>
+            <a:r>
+              <a:rPr sz="1400" b="0">
+                <a:solidFill>
+                  <a:srgbClr val="E4ECF7"/>
+                </a:solidFill>
+                <a:latin typeface="Consolas"/>
+              </a:rPr>
+              <a:t>  AND days_kept &gt; 14;        -- 13</a:t>
+            </a:r>
+          </a:p>
+        </p:txBody>
+      </p:sp>
+      <p:sp>
+        <p:nvSpPr>
+          <p:cNvPr id="10" name="TextBox 9"/>
+          <p:cNvSpPr txBox="1"/>
+          <p:nvPr/>
+        </p:nvSpPr>
+        <p:spPr>
+          <a:xfrm>
+            <a:off x="685800" y="3058160"/>
+            <a:ext cx="10820095" cy="513080"/>
+          </a:xfrm>
+          <a:prstGeom prst="rect">
+            <a:avLst/>
+          </a:prstGeom>
+          <a:noFill/>
+        </p:spPr>
+        <p:txBody>
+          <a:bodyPr wrap="square" anchor="t" lIns="0" rIns="0" tIns="0" bIns="0">
+            <a:spAutoFit/>
+          </a:bodyPr>
+          <a:lstStyle/>
+          <a:p>
+            <a:pPr>
+              <a:spcAft>
+                <a:spcPts val="800"/>
+              </a:spcAft>
+            </a:pPr>
+            <a:r>
+              <a:rPr sz="1700" b="0">
+                <a:solidFill>
+                  <a:srgbClr val="1C1C1A"/>
+                </a:solidFill>
+                <a:latin typeface="Calibri"/>
+              </a:rPr>
+              <a:t>Issue 3 adds 6 and issue 7 adds 7: 13, the same number the function returned.</a:t>
+            </a:r>
+          </a:p>
+        </p:txBody>
+      </p:sp>
       <p:pic>
         <p:nvPicPr>
-          <p:cNvPr id="7" name="Picture 6" descr="d9f5d5431a93de8d.png"/>
+          <p:cNvPr id="11" name="Picture 10" descr="223aefecd6db2d61.png"/>
           <p:cNvPicPr>
             <a:picLocks noChangeAspect="1"/>
           </p:cNvPicPr>
@@ -5809,228 +6023,14 @@
         </p:blipFill>
         <p:spPr>
           <a:xfrm>
-            <a:off x="685800" y="3245975"/>
-            <a:ext cx="4652640" cy="1189008"/>
+            <a:off x="1042269" y="3699256"/>
+            <a:ext cx="10107156" cy="2354072"/>
           </a:xfrm>
           <a:prstGeom prst="rect">
             <a:avLst/>
           </a:prstGeom>
         </p:spPr>
       </p:pic>
-      <p:sp>
-        <p:nvSpPr>
-          <p:cNvPr id="8" name="Rectangle 7"/>
-          <p:cNvSpPr/>
-          <p:nvPr/>
-        </p:nvSpPr>
-        <p:spPr>
-          <a:xfrm>
-            <a:off x="5771244" y="2597912"/>
-            <a:ext cx="5734650" cy="1410208"/>
-          </a:xfrm>
-          <a:prstGeom prst="rect">
-            <a:avLst/>
-          </a:prstGeom>
-          <a:solidFill>
-            <a:srgbClr val="1C1C1A"/>
-          </a:solidFill>
-          <a:ln>
-            <a:noFill/>
-          </a:ln>
-          <a:effectLst/>
-        </p:spPr>
-        <p:style>
-          <a:lnRef idx="1">
-            <a:schemeClr val="accent1"/>
-          </a:lnRef>
-          <a:fillRef idx="3">
-            <a:schemeClr val="accent1"/>
-          </a:fillRef>
-          <a:effectRef idx="2">
-            <a:schemeClr val="accent1"/>
-          </a:effectRef>
-          <a:fontRef idx="minor">
-            <a:schemeClr val="lt1"/>
-          </a:fontRef>
-        </p:style>
-        <p:txBody>
-          <a:bodyPr rtlCol="0" anchor="ctr" wrap="square"/>
-          <a:lstStyle/>
-          <a:p>
-            <a:pPr algn="ctr"/>
-          </a:p>
-        </p:txBody>
-      </p:sp>
-      <p:sp>
-        <p:nvSpPr>
-          <p:cNvPr id="9" name="Rectangle 8"/>
-          <p:cNvSpPr/>
-          <p:nvPr/>
-        </p:nvSpPr>
-        <p:spPr>
-          <a:xfrm>
-            <a:off x="5771244" y="2597912"/>
-            <a:ext cx="50292" cy="1410208"/>
-          </a:xfrm>
-          <a:prstGeom prst="rect">
-            <a:avLst/>
-          </a:prstGeom>
-          <a:solidFill>
-            <a:srgbClr val="2B4A7D"/>
-          </a:solidFill>
-          <a:ln>
-            <a:noFill/>
-          </a:ln>
-          <a:effectLst/>
-        </p:spPr>
-        <p:style>
-          <a:lnRef idx="1">
-            <a:schemeClr val="accent1"/>
-          </a:lnRef>
-          <a:fillRef idx="3">
-            <a:schemeClr val="accent1"/>
-          </a:fillRef>
-          <a:effectRef idx="2">
-            <a:schemeClr val="accent1"/>
-          </a:effectRef>
-          <a:fontRef idx="minor">
-            <a:schemeClr val="lt1"/>
-          </a:fontRef>
-        </p:style>
-        <p:txBody>
-          <a:bodyPr rtlCol="0" anchor="ctr" wrap="square"/>
-          <a:lstStyle/>
-          <a:p>
-            <a:pPr algn="ctr"/>
-          </a:p>
-        </p:txBody>
-      </p:sp>
-      <p:sp>
-        <p:nvSpPr>
-          <p:cNvPr id="10" name="TextBox 9"/>
-          <p:cNvSpPr txBox="1"/>
-          <p:nvPr/>
-        </p:nvSpPr>
-        <p:spPr>
-          <a:xfrm>
-            <a:off x="6008988" y="2698496"/>
-            <a:ext cx="5332314" cy="1227328"/>
-          </a:xfrm>
-          <a:prstGeom prst="rect">
-            <a:avLst/>
-          </a:prstGeom>
-          <a:noFill/>
-        </p:spPr>
-        <p:txBody>
-          <a:bodyPr wrap="square" anchor="t" lIns="0" rIns="0" tIns="0" bIns="0">
-            <a:spAutoFit/>
-          </a:bodyPr>
-          <a:lstStyle/>
-          <a:p>
-            <a:pPr>
-              <a:spcAft>
-                <a:spcPts val="200"/>
-              </a:spcAft>
-            </a:pPr>
-            <a:r>
-              <a:rPr sz="1600" b="0">
-                <a:solidFill>
-                  <a:srgbClr val="E4ECF7"/>
-                </a:solidFill>
-                <a:latin typeface="Consolas"/>
-              </a:rPr>
-              <a:t>SELECT SUM(days_kept - 14) AS late_days</a:t>
-            </a:r>
-          </a:p>
-          <a:p>
-            <a:pPr>
-              <a:spcAft>
-                <a:spcPts val="200"/>
-              </a:spcAft>
-            </a:pPr>
-            <a:r>
-              <a:rPr sz="1600" b="0">
-                <a:solidFill>
-                  <a:srgbClr val="E4ECF7"/>
-                </a:solidFill>
-                <a:latin typeface="Consolas"/>
-              </a:rPr>
-              <a:t>FROM issues</a:t>
-            </a:r>
-          </a:p>
-          <a:p>
-            <a:pPr>
-              <a:spcAft>
-                <a:spcPts val="200"/>
-              </a:spcAft>
-            </a:pPr>
-            <a:r>
-              <a:rPr sz="1600" b="0">
-                <a:solidFill>
-                  <a:srgbClr val="E4ECF7"/>
-                </a:solidFill>
-                <a:latin typeface="Consolas"/>
-              </a:rPr>
-              <a:t>WHERE week = 1</a:t>
-            </a:r>
-          </a:p>
-          <a:p>
-            <a:pPr>
-              <a:spcAft>
-                <a:spcPts val="200"/>
-              </a:spcAft>
-            </a:pPr>
-            <a:r>
-              <a:rPr sz="1600" b="0">
-                <a:solidFill>
-                  <a:srgbClr val="E4ECF7"/>
-                </a:solidFill>
-                <a:latin typeface="Consolas"/>
-              </a:rPr>
-              <a:t>  AND days_kept &gt; 14;        -- 13</a:t>
-            </a:r>
-          </a:p>
-        </p:txBody>
-      </p:sp>
-      <p:sp>
-        <p:nvSpPr>
-          <p:cNvPr id="11" name="TextBox 10"/>
-          <p:cNvSpPr txBox="1"/>
-          <p:nvPr/>
-        </p:nvSpPr>
-        <p:spPr>
-          <a:xfrm>
-            <a:off x="5771244" y="4172712"/>
-            <a:ext cx="5734650" cy="910336"/>
-          </a:xfrm>
-          <a:prstGeom prst="rect">
-            <a:avLst/>
-          </a:prstGeom>
-          <a:noFill/>
-        </p:spPr>
-        <p:txBody>
-          <a:bodyPr wrap="square" anchor="t" lIns="0" rIns="0" tIns="0" bIns="0">
-            <a:spAutoFit/>
-          </a:bodyPr>
-          <a:lstStyle/>
-          <a:p>
-            <a:pPr>
-              <a:spcAft>
-                <a:spcPts val="900"/>
-              </a:spcAft>
-            </a:pPr>
-            <a:r>
-              <a:rPr sz="2000" b="0">
-                <a:solidFill>
-                  <a:srgbClr val="1C1C1A"/>
-                </a:solidFill>
-                <a:latin typeface="Calibri"/>
-              </a:rPr>
-              <a:t>Issue 3 adds 6 and issue 7 adds 7: 13, the same number the function returned.</a:t>
-            </a:r>
-          </a:p>
-        </p:txBody>
-      </p:sp>
       <p:sp>
         <p:nvSpPr>
           <p:cNvPr id="12" name="Rectangle 11"/>
